--- a/output/education/2026-03-29_japan-sweden-longevity/japan-sweden-longevity_slides_residents.pptx
+++ b/output/education/2026-03-29_japan-sweden-longevity/japan-sweden-longevity_slides_residents.pptx
@@ -3140,6 +3140,7 @@
               </a:defRPr>
             </a:pPr>
             <a:r>
+              <a:rPr/>
               <a:t>長寿 = 健康ではない</a:t>
             </a:r>
           </a:p>
@@ -3176,6 +3177,7 @@
               </a:defRPr>
             </a:pPr>
             <a:r>
+              <a:rPr/>
               <a:t>-- データで考える在宅医療の意義 --</a:t>
             </a:r>
           </a:p>
@@ -3212,6 +3214,7 @@
               </a:defRPr>
             </a:pPr>
             <a:r>
+              <a:rPr/>
               <a:t>研修医・専攻医向け  |  15分  |  2026-03-29</a:t>
             </a:r>
           </a:p>
@@ -3248,6 +3251,7 @@
               </a:defRPr>
             </a:pPr>
             <a:r>
+              <a:rPr/>
               <a:t>BMC Medicine 2026 -- Murata, Modig et al.</a:t>
             </a:r>
           </a:p>
@@ -3310,6 +3314,7 @@
               </a:defRPr>
             </a:pPr>
             <a:r>
+              <a:rPr/>
               <a:t>ペアディスカッション (4分)</a:t>
             </a:r>
           </a:p>
@@ -3346,6 +3351,7 @@
               </a:defRPr>
             </a:pPr>
             <a:r>
+              <a:rPr/>
               <a:t>問い1 (2分)</a:t>
             </a:r>
           </a:p>
@@ -3382,10 +3388,12 @@
               </a:defRPr>
             </a:pPr>
             <a:r>
+              <a:rPr/>
               <a:t>あなたが担当している在宅患者さんを1人思い浮かべてください。</a:t>
             </a:r>
             <a:br/>
             <a:r>
+              <a:rPr/>
               <a:t>その方のケアのどの部分が「死亡率を下げる」ことに貢献していると思いますか?</a:t>
             </a:r>
           </a:p>
@@ -3422,6 +3430,7 @@
               </a:defRPr>
             </a:pPr>
             <a:r>
+              <a:rPr/>
               <a:t>問い2 (2分)</a:t>
             </a:r>
           </a:p>
@@ -3458,6 +3467,7 @@
               </a:defRPr>
             </a:pPr>
             <a:r>
+              <a:rPr/>
               <a:t>この研究の知見は、在宅医療の価値を患者・家族にどう説明するときに使えますか?</a:t>
             </a:r>
           </a:p>
@@ -3520,6 +3530,7 @@
               </a:defRPr>
             </a:pPr>
             <a:r>
+              <a:rPr/>
               <a:t>ディスカッション共有</a:t>
             </a:r>
           </a:p>
@@ -3556,6 +3567,7 @@
               </a:defRPr>
             </a:pPr>
             <a:r>
+              <a:rPr/>
               <a:t>期待される視点</a:t>
             </a:r>
           </a:p>
@@ -3595,6 +3607,7 @@
               </a:defRPr>
             </a:pPr>
             <a:r>
+              <a:rPr/>
               <a:t>訪問診療による早期介入 (急変の早期発見)</a:t>
             </a:r>
           </a:p>
@@ -3611,6 +3624,7 @@
               </a:defRPr>
             </a:pPr>
             <a:r>
+              <a:rPr/>
               <a:t>多職種連携のシステム効果</a:t>
             </a:r>
           </a:p>
@@ -3627,6 +3641,7 @@
               </a:defRPr>
             </a:pPr>
             <a:r>
+              <a:rPr/>
               <a:t>家族を含めたケアチームの存在</a:t>
             </a:r>
           </a:p>
@@ -3643,6 +3658,7 @@
               </a:defRPr>
             </a:pPr>
             <a:r>
+              <a:rPr/>
               <a:t>「関係性のネットワーク」としてのケアシステム</a:t>
             </a:r>
           </a:p>
@@ -3679,6 +3695,7 @@
               </a:defRPr>
             </a:pPr>
             <a:r>
+              <a:rPr/>
               <a:t>倫理的問い</a:t>
             </a:r>
           </a:p>
@@ -3718,6 +3735,7 @@
               </a:defRPr>
             </a:pPr>
             <a:r>
+              <a:rPr/>
               <a:t>積極的医療介入が寿命延伸に寄与</a:t>
             </a:r>
           </a:p>
@@ -3734,6 +3752,7 @@
               </a:defRPr>
             </a:pPr>
             <a:r>
+              <a:rPr/>
               <a:t>-&gt; 常に望ましいのか?</a:t>
             </a:r>
           </a:p>
@@ -3750,6 +3769,7 @@
               </a:defRPr>
             </a:pPr>
             <a:r>
+              <a:rPr/>
               <a:t>QOL と QOD のバランスは?</a:t>
             </a:r>
           </a:p>
@@ -3812,6 +3832,7 @@
               </a:defRPr>
             </a:pPr>
             <a:r>
+              <a:rPr/>
               <a:t>振り返り -- 3つの Key Takeaway</a:t>
             </a:r>
           </a:p>
@@ -3851,6 +3872,7 @@
               </a:defRPr>
             </a:pPr>
             <a:r>
+              <a:rPr/>
               <a:t>1. 日本の長寿は「健康な国民」ではなく</a:t>
             </a:r>
           </a:p>
@@ -3867,6 +3889,7 @@
               </a:defRPr>
             </a:pPr>
             <a:r>
+              <a:rPr/>
               <a:t>   「ケアシステムの力」が主因かもしれない</a:t>
             </a:r>
           </a:p>
@@ -3896,6 +3919,7 @@
               </a:defRPr>
             </a:pPr>
             <a:r>
+              <a:rPr/>
               <a:t>2. 健康寿命は日瑞でほぼ同等</a:t>
             </a:r>
           </a:p>
@@ -3912,6 +3936,7 @@
               </a:defRPr>
             </a:pPr>
             <a:r>
+              <a:rPr/>
               <a:t>   差は「介護受給者の死亡率」にある</a:t>
             </a:r>
           </a:p>
@@ -3941,6 +3966,7 @@
               </a:defRPr>
             </a:pPr>
             <a:r>
+              <a:rPr/>
               <a:t>3. あなたが関わる在宅ケアの一つ一つが</a:t>
             </a:r>
           </a:p>
@@ -3957,6 +3983,7 @@
               </a:defRPr>
             </a:pPr>
             <a:r>
+              <a:rPr/>
               <a:t>   日本の長寿統計を支えている</a:t>
             </a:r>
           </a:p>
@@ -4019,6 +4046,7 @@
               </a:defRPr>
             </a:pPr>
             <a:r>
+              <a:rPr/>
               <a:t>持ち帰りの問い</a:t>
             </a:r>
           </a:p>
@@ -4055,6 +4083,7 @@
               </a:defRPr>
             </a:pPr>
             <a:r>
+              <a:rPr/>
               <a:t>明日の訪問診療で:「この患者さんのケアが、国際比較データの中の1データポイントである」と意識したとき、何が変わりますか?</a:t>
             </a:r>
           </a:p>
@@ -4091,6 +4120,7 @@
               </a:defRPr>
             </a:pPr>
             <a:r>
+              <a:rPr/>
               <a:t>さらに深めたい方へ</a:t>
             </a:r>
           </a:p>
@@ -4130,6 +4160,7 @@
               </a:defRPr>
             </a:pPr>
             <a:r>
+              <a:rPr/>
               <a:t>原著論文: BMC Medicine 2026 (左QR)</a:t>
             </a:r>
           </a:p>
@@ -4146,6 +4177,7 @@
               </a:defRPr>
             </a:pPr>
             <a:r>
+              <a:rPr/>
               <a:t>カロリンスカ研究所プレスリリース (右QR)</a:t>
             </a:r>
           </a:p>
@@ -4256,6 +4288,7 @@
               </a:defRPr>
             </a:pPr>
             <a:r>
+              <a:rPr/>
               <a:t>出典</a:t>
             </a:r>
           </a:p>
@@ -4295,6 +4328,7 @@
               </a:defRPr>
             </a:pPr>
             <a:r>
+              <a:rPr/>
               <a:t>1. Murata S, Modig K, et al. BMC Medicine. 2026. doi:10.1186/s12916-026-04786-z</a:t>
             </a:r>
           </a:p>
@@ -4311,6 +4345,7 @@
               </a:defRPr>
             </a:pPr>
             <a:r>
+              <a:rPr/>
               <a:t>2. OECD. Health at a Glance 2025: Japan. 2025.</a:t>
             </a:r>
           </a:p>
@@ -4327,6 +4362,7 @@
               </a:defRPr>
             </a:pPr>
             <a:r>
+              <a:rPr/>
               <a:t>3. 内閣府. 令和6年版高齢社会白書. 2024.</a:t>
             </a:r>
           </a:p>
@@ -4343,6 +4379,7 @@
               </a:defRPr>
             </a:pPr>
             <a:r>
+              <a:rPr/>
               <a:t>4. Tsutsui T. Int J Integr Care. 2014;14:e002.</a:t>
             </a:r>
           </a:p>
@@ -4379,6 +4416,7 @@
               </a:defRPr>
             </a:pPr>
             <a:r>
+              <a:rPr/>
               <a:t>教材ダウンロード (GitHub)</a:t>
             </a:r>
           </a:p>
@@ -4465,6 +4503,7 @@
               </a:defRPr>
             </a:pPr>
             <a:r>
+              <a:rPr/>
               <a:t>問い: なぜ日本人は長生きなのか?</a:t>
             </a:r>
           </a:p>
@@ -4504,6 +4543,7 @@
               </a:defRPr>
             </a:pPr>
             <a:r>
+              <a:rPr/>
               <a:t>あなたの答えを一つ、頭の中に思い浮かべてください</a:t>
             </a:r>
           </a:p>
@@ -4533,6 +4573,7 @@
               </a:defRPr>
             </a:pPr>
             <a:r>
+              <a:rPr/>
               <a:t>食事? 遺伝? 医療制度? 運動習慣?</a:t>
             </a:r>
           </a:p>
@@ -4549,6 +4590,7 @@
               </a:defRPr>
             </a:pPr>
             <a:r>
+              <a:rPr/>
               <a:t>今日のデータは、その常識を覆すかもしれません</a:t>
             </a:r>
           </a:p>
@@ -4611,6 +4653,7 @@
               </a:defRPr>
             </a:pPr>
             <a:r>
+              <a:rPr/>
               <a:t>この勉強会のゴール</a:t>
             </a:r>
           </a:p>
@@ -4647,6 +4690,7 @@
               </a:defRPr>
             </a:pPr>
             <a:r>
+              <a:rPr/>
               <a:t>この15分の後、あなたは:</a:t>
             </a:r>
           </a:p>
@@ -4686,6 +4730,7 @@
               </a:defRPr>
             </a:pPr>
             <a:r>
+              <a:rPr/>
               <a:t>1. 日瑞比較研究の主要データを説明できる (理解)</a:t>
             </a:r>
           </a:p>
@@ -4702,6 +4747,7 @@
               </a:defRPr>
             </a:pPr>
             <a:r>
+              <a:rPr/>
               <a:t>2. 「長寿=健康な国民」という仮説を批判的に吟味できる (分析)</a:t>
             </a:r>
           </a:p>
@@ -4718,6 +4764,7 @@
               </a:defRPr>
             </a:pPr>
             <a:r>
+              <a:rPr/>
               <a:t>3. 在宅医療の意義を国際比較データで語る準備ができる (創造)</a:t>
             </a:r>
           </a:p>
@@ -4780,6 +4827,7 @@
               </a:defRPr>
             </a:pPr>
             <a:r>
+              <a:rPr/>
               <a:t>前提知識: 健康寿命と平均寿命</a:t>
             </a:r>
           </a:p>
@@ -4819,6 +4867,7 @@
               </a:defRPr>
             </a:pPr>
             <a:r>
+              <a:rPr/>
               <a:t>平均寿命: 0歳時点の平均余命</a:t>
             </a:r>
           </a:p>
@@ -4835,6 +4884,7 @@
               </a:defRPr>
             </a:pPr>
             <a:r>
+              <a:rPr/>
               <a:t>健康寿命: 日常生活に制限なく生活できる期間</a:t>
             </a:r>
           </a:p>
@@ -4851,6 +4901,7 @@
               </a:defRPr>
             </a:pPr>
             <a:r>
+              <a:rPr/>
               <a:t>日本 (2022年): 男性 81.05歳 (健康寿命 72.57歳)</a:t>
             </a:r>
           </a:p>
@@ -4867,6 +4918,7 @@
               </a:defRPr>
             </a:pPr>
             <a:r>
+              <a:rPr/>
               <a:t>                     女性 87.09歳 (健康寿命 75.45歳)</a:t>
             </a:r>
           </a:p>
@@ -4883,6 +4935,7 @@
               </a:defRPr>
             </a:pPr>
             <a:r>
+              <a:rPr/>
               <a:t>ギャップ = 不健康な期間: 男性 約8.5年、女性 約11.6年</a:t>
             </a:r>
           </a:p>
@@ -4919,6 +4972,7 @@
               </a:defRPr>
             </a:pPr>
             <a:r>
+              <a:rPr/>
               <a:t>この「ギャップ」の期間に何が起きているかが、今日の論文の焦点です</a:t>
             </a:r>
           </a:p>
@@ -4981,6 +5035,7 @@
               </a:defRPr>
             </a:pPr>
             <a:r>
+              <a:rPr/>
               <a:t>研究の概要</a:t>
             </a:r>
           </a:p>
@@ -4994,7 +5049,7 @@
         </p:nvSpPr>
         <p:spPr>
           <a:xfrm>
-            <a:off x="731520" y="1280160"/>
+            <a:off x="731520" y="1389888"/>
             <a:ext cx="10698480" cy="548640"/>
           </a:xfrm>
           <a:prstGeom prst="rect">
@@ -5017,6 +5072,7 @@
               </a:defRPr>
             </a:pPr>
             <a:r>
+              <a:rPr/>
               <a:t>Understanding Japan's mortality advantage (BMC Medicine, 2026.3.23)</a:t>
             </a:r>
           </a:p>
@@ -5056,6 +5112,7 @@
               </a:defRPr>
             </a:pPr>
             <a:r>
+              <a:rPr/>
               <a:t>研究チーム: カロリンスカ研究所 Karin Modig ら (九州大学・神戸大学と共同)</a:t>
             </a:r>
           </a:p>
@@ -5072,6 +5129,7 @@
               </a:defRPr>
             </a:pPr>
             <a:r>
+              <a:rPr/>
               <a:t>筆頭著者: Shunsuke Murata</a:t>
             </a:r>
           </a:p>
@@ -5088,6 +5146,7 @@
               </a:defRPr>
             </a:pPr>
             <a:r>
+              <a:rPr/>
               <a:t>デザイン: 後ろ向きコホート (全人口レジストリデータ)</a:t>
             </a:r>
           </a:p>
@@ -5104,6 +5163,7 @@
               </a:defRPr>
             </a:pPr>
             <a:r>
+              <a:rPr/>
               <a:t>対象: 75歳以上 -- 日本9自治体 (33万人超) vs スウェーデン (85万人超)</a:t>
             </a:r>
           </a:p>
@@ -5120,6 +5180,7 @@
               </a:defRPr>
             </a:pPr>
             <a:r>
+              <a:rPr/>
               <a:t>分析手法: 75歳時の残余余命を「介護なし期間」と「介護受給期間」に分解</a:t>
             </a:r>
           </a:p>
@@ -5182,6 +5243,7 @@
               </a:defRPr>
             </a:pPr>
             <a:r>
+              <a:rPr/>
               <a:t>核心データ</a:t>
             </a:r>
           </a:p>
@@ -5735,6 +5797,7 @@
               </a:defRPr>
             </a:pPr>
             <a:r>
+              <a:rPr/>
               <a:t>健康寿命はほぼ同等。差が生まれているのは「介護を受けている期間」</a:t>
             </a:r>
           </a:p>
@@ -5797,6 +5860,7 @@
               </a:defRPr>
             </a:pPr>
             <a:r>
+              <a:rPr/>
               <a:t>核心的発見</a:t>
             </a:r>
           </a:p>
@@ -5833,6 +5897,7 @@
               </a:defRPr>
             </a:pPr>
             <a:r>
+              <a:rPr/>
               <a:t>日本の平均寿命の優位性は「介護受給者の低死亡率」に起因する</a:t>
             </a:r>
           </a:p>
@@ -5872,6 +5937,7 @@
               </a:defRPr>
             </a:pPr>
             <a:r>
+              <a:rPr/>
               <a:t>介護を受けずに暮らせる年数 (健康寿命) は日瑞でほぼ差がない</a:t>
             </a:r>
           </a:p>
@@ -5888,6 +5954,7 @@
               </a:defRPr>
             </a:pPr>
             <a:r>
+              <a:rPr/>
               <a:t>日本女性の優位 (+1.8年) の大部分は介護受給期間の長さ (5.1年 vs 3.8年)</a:t>
             </a:r>
           </a:p>
@@ -5904,6 +5971,7 @@
               </a:defRPr>
             </a:pPr>
             <a:r>
+              <a:rPr/>
               <a:t>-&gt; 介護受給者の死亡率が日本で有意に低い</a:t>
             </a:r>
           </a:p>
@@ -5940,6 +6008,7 @@
               </a:defRPr>
             </a:pPr>
             <a:r>
+              <a:rPr/>
               <a:t>Karin Modig: "Perhaps Japan's long life expectancy is not primarily due to the population being healthier"</a:t>
             </a:r>
           </a:p>
@@ -6002,6 +6071,7 @@
               </a:defRPr>
             </a:pPr>
             <a:r>
+              <a:rPr/>
               <a:t>批判的吟味</a:t>
             </a:r>
           </a:p>
@@ -6038,6 +6108,7 @@
               </a:defRPr>
             </a:pPr>
             <a:r>
+              <a:rPr/>
               <a:t>Strengths</a:t>
             </a:r>
           </a:p>
@@ -6077,6 +6148,7 @@
               </a:defRPr>
             </a:pPr>
             <a:r>
+              <a:rPr/>
               <a:t>全人口レジストリデータ (選択バイアス小)</a:t>
             </a:r>
           </a:p>
@@ -6093,6 +6165,7 @@
               </a:defRPr>
             </a:pPr>
             <a:r>
+              <a:rPr/>
               <a:t>75歳以上に限定し比較可能性を確保</a:t>
             </a:r>
           </a:p>
@@ -6109,6 +6182,7 @@
               </a:defRPr>
             </a:pPr>
             <a:r>
+              <a:rPr/>
               <a:t>査読済み (BMC Medicine, IF 7.0+)</a:t>
             </a:r>
           </a:p>
@@ -6145,6 +6219,7 @@
               </a:defRPr>
             </a:pPr>
             <a:r>
+              <a:rPr/>
               <a:t>Limitations</a:t>
             </a:r>
           </a:p>
@@ -6184,6 +6259,7 @@
               </a:defRPr>
             </a:pPr>
             <a:r>
+              <a:rPr/>
               <a:t>「介護認定」の定義が日瑞で異なる</a:t>
             </a:r>
           </a:p>
@@ -6200,6 +6276,7 @@
               </a:defRPr>
             </a:pPr>
             <a:r>
+              <a:rPr/>
               <a:t>日本は9自治体のみ (全国代表性の限界)</a:t>
             </a:r>
           </a:p>
@@ -6216,6 +6293,7 @@
               </a:defRPr>
             </a:pPr>
             <a:r>
+              <a:rPr/>
               <a:t>死亡率の「なぜ」は未解明</a:t>
             </a:r>
           </a:p>
@@ -6232,6 +6310,7 @@
               </a:defRPr>
             </a:pPr>
             <a:r>
+              <a:rPr/>
               <a:t>交絡因子の調整が不十分な可能性</a:t>
             </a:r>
           </a:p>
@@ -6294,6 +6373,7 @@
               </a:defRPr>
             </a:pPr>
             <a:r>
+              <a:rPr/>
               <a:t>なぜ日本の介護受給者は死亡率が低いのか?</a:t>
             </a:r>
           </a:p>
@@ -6333,6 +6413,7 @@
               </a:defRPr>
             </a:pPr>
             <a:r>
+              <a:rPr/>
               <a:t>1. 在宅医療の充実: 訪問診療・訪問看護の体制 (日本のユニークさ)</a:t>
             </a:r>
           </a:p>
@@ -6349,6 +6430,7 @@
               </a:defRPr>
             </a:pPr>
             <a:r>
+              <a:rPr/>
               <a:t>2. 家族介護の文化: 家族介護 + 公的サービスのハイブリッドモデル</a:t>
             </a:r>
           </a:p>
@@ -6365,6 +6447,7 @@
               </a:defRPr>
             </a:pPr>
             <a:r>
+              <a:rPr/>
               <a:t>3. 終末期医療の積極性: スウェーデンより積極的医療介入の傾向</a:t>
             </a:r>
           </a:p>
@@ -6381,6 +6464,7 @@
               </a:defRPr>
             </a:pPr>
             <a:r>
+              <a:rPr/>
               <a:t>4. 介護保険制度: 2000年導入、65歳以上の18.9%が要介護認定 (676.6万人)</a:t>
             </a:r>
           </a:p>
@@ -6417,6 +6501,7 @@
               </a:defRPr>
             </a:pPr>
             <a:r>
+              <a:rPr/>
               <a:t>対比: スウェーデンはCOVID-19初期に高齢者施設での死亡が突出 (死亡者の90%が70歳以上)</a:t>
             </a:r>
           </a:p>
